--- a/ゲーム科3年/00_前期/オンラインゲームプログラミングⅠ/13_ゲーム制作課題.pptx
+++ b/ゲーム科3年/00_前期/オンラインゲームプログラミングⅠ/13_ゲーム制作課題.pptx
@@ -9,7 +9,8 @@
     <p:sldId id="257" r:id="rId3"/>
     <p:sldId id="258" r:id="rId4"/>
     <p:sldId id="259" r:id="rId5"/>
-    <p:sldId id="261" r:id="rId6"/>
+    <p:sldId id="262" r:id="rId6"/>
+    <p:sldId id="261" r:id="rId7"/>
   </p:sldIdLst>
   <p:sldSz cx="12192000" cy="6858000"/>
   <p:notesSz cx="6858000" cy="9144000"/>
@@ -263,7 +264,7 @@
           <a:p>
             <a:fld id="{E9CC885B-4903-4D54-9A93-00025F12DED9}" type="datetimeFigureOut">
               <a:rPr kumimoji="1" lang="ja-JP" altLang="en-US" smtClean="0"/>
-              <a:t>2025/12/11</a:t>
+              <a:t>2026/1/19</a:t>
             </a:fld>
             <a:endParaRPr kumimoji="1" lang="ja-JP" altLang="en-US"/>
           </a:p>
@@ -493,7 +494,7 @@
           <a:p>
             <a:fld id="{E9CC885B-4903-4D54-9A93-00025F12DED9}" type="datetimeFigureOut">
               <a:rPr kumimoji="1" lang="ja-JP" altLang="en-US" smtClean="0"/>
-              <a:t>2025/12/11</a:t>
+              <a:t>2026/1/19</a:t>
             </a:fld>
             <a:endParaRPr kumimoji="1" lang="ja-JP" altLang="en-US"/>
           </a:p>
@@ -733,7 +734,7 @@
           <a:p>
             <a:fld id="{E9CC885B-4903-4D54-9A93-00025F12DED9}" type="datetimeFigureOut">
               <a:rPr kumimoji="1" lang="ja-JP" altLang="en-US" smtClean="0"/>
-              <a:t>2025/12/11</a:t>
+              <a:t>2026/1/19</a:t>
             </a:fld>
             <a:endParaRPr kumimoji="1" lang="ja-JP" altLang="en-US"/>
           </a:p>
@@ -963,7 +964,7 @@
           <a:p>
             <a:fld id="{E9CC885B-4903-4D54-9A93-00025F12DED9}" type="datetimeFigureOut">
               <a:rPr kumimoji="1" lang="ja-JP" altLang="en-US" smtClean="0"/>
-              <a:t>2025/12/11</a:t>
+              <a:t>2026/1/19</a:t>
             </a:fld>
             <a:endParaRPr kumimoji="1" lang="ja-JP" altLang="en-US"/>
           </a:p>
@@ -1238,7 +1239,7 @@
           <a:p>
             <a:fld id="{E9CC885B-4903-4D54-9A93-00025F12DED9}" type="datetimeFigureOut">
               <a:rPr kumimoji="1" lang="ja-JP" altLang="en-US" smtClean="0"/>
-              <a:t>2025/12/11</a:t>
+              <a:t>2026/1/19</a:t>
             </a:fld>
             <a:endParaRPr kumimoji="1" lang="ja-JP" altLang="en-US"/>
           </a:p>
@@ -1567,7 +1568,7 @@
           <a:p>
             <a:fld id="{E9CC885B-4903-4D54-9A93-00025F12DED9}" type="datetimeFigureOut">
               <a:rPr kumimoji="1" lang="ja-JP" altLang="en-US" smtClean="0"/>
-              <a:t>2025/12/11</a:t>
+              <a:t>2026/1/19</a:t>
             </a:fld>
             <a:endParaRPr kumimoji="1" lang="ja-JP" altLang="en-US"/>
           </a:p>
@@ -2043,7 +2044,7 @@
           <a:p>
             <a:fld id="{E9CC885B-4903-4D54-9A93-00025F12DED9}" type="datetimeFigureOut">
               <a:rPr kumimoji="1" lang="ja-JP" altLang="en-US" smtClean="0"/>
-              <a:t>2025/12/11</a:t>
+              <a:t>2026/1/19</a:t>
             </a:fld>
             <a:endParaRPr kumimoji="1" lang="ja-JP" altLang="en-US"/>
           </a:p>
@@ -2184,7 +2185,7 @@
           <a:p>
             <a:fld id="{E9CC885B-4903-4D54-9A93-00025F12DED9}" type="datetimeFigureOut">
               <a:rPr kumimoji="1" lang="ja-JP" altLang="en-US" smtClean="0"/>
-              <a:t>2025/12/11</a:t>
+              <a:t>2026/1/19</a:t>
             </a:fld>
             <a:endParaRPr kumimoji="1" lang="ja-JP" altLang="en-US"/>
           </a:p>
@@ -2297,7 +2298,7 @@
           <a:p>
             <a:fld id="{E9CC885B-4903-4D54-9A93-00025F12DED9}" type="datetimeFigureOut">
               <a:rPr kumimoji="1" lang="ja-JP" altLang="en-US" smtClean="0"/>
-              <a:t>2025/12/11</a:t>
+              <a:t>2026/1/19</a:t>
             </a:fld>
             <a:endParaRPr kumimoji="1" lang="ja-JP" altLang="en-US"/>
           </a:p>
@@ -2640,7 +2641,7 @@
           <a:p>
             <a:fld id="{E9CC885B-4903-4D54-9A93-00025F12DED9}" type="datetimeFigureOut">
               <a:rPr kumimoji="1" lang="ja-JP" altLang="en-US" smtClean="0"/>
-              <a:t>2025/12/11</a:t>
+              <a:t>2026/1/19</a:t>
             </a:fld>
             <a:endParaRPr kumimoji="1" lang="ja-JP" altLang="en-US"/>
           </a:p>
@@ -2928,7 +2929,7 @@
           <a:p>
             <a:fld id="{E9CC885B-4903-4D54-9A93-00025F12DED9}" type="datetimeFigureOut">
               <a:rPr kumimoji="1" lang="ja-JP" altLang="en-US" smtClean="0"/>
-              <a:t>2025/12/11</a:t>
+              <a:t>2026/1/19</a:t>
             </a:fld>
             <a:endParaRPr kumimoji="1" lang="ja-JP" altLang="en-US"/>
           </a:p>
@@ -3201,7 +3202,7 @@
           <a:p>
             <a:fld id="{E9CC885B-4903-4D54-9A93-00025F12DED9}" type="datetimeFigureOut">
               <a:rPr kumimoji="1" lang="ja-JP" altLang="en-US" smtClean="0"/>
-              <a:t>2025/12/11</a:t>
+              <a:t>2026/1/19</a:t>
             </a:fld>
             <a:endParaRPr kumimoji="1" lang="ja-JP" altLang="en-US"/>
           </a:p>
@@ -4509,6 +4510,225 @@
         <p:spPr>
           <a:xfrm>
             <a:off x="567542" y="1216429"/>
+            <a:ext cx="9725739" cy="5632311"/>
+          </a:xfrm>
+          <a:prstGeom prst="rect">
+            <a:avLst/>
+          </a:prstGeom>
+          <a:noFill/>
+        </p:spPr>
+        <p:txBody>
+          <a:bodyPr wrap="none" rtlCol="0">
+            <a:spAutoFit/>
+          </a:bodyPr>
+          <a:lstStyle/>
+          <a:p>
+            <a:r>
+              <a:rPr lang="ja-JP" altLang="en-US" sz="2400" dirty="0"/>
+              <a:t>スマホゲームのほとんどがネットワーク技術を使っています。</a:t>
+            </a:r>
+            <a:endParaRPr lang="en-US" altLang="ja-JP" sz="2400" dirty="0"/>
+          </a:p>
+          <a:p>
+            <a:r>
+              <a:rPr lang="ja-JP" altLang="en-US" sz="2400" dirty="0"/>
+              <a:t>もし興味がある方は、ガチャを作ってみても良いかもしれません。</a:t>
+            </a:r>
+            <a:endParaRPr lang="en-US" altLang="ja-JP" sz="2400" dirty="0"/>
+          </a:p>
+          <a:p>
+            <a:endParaRPr lang="en-US" altLang="ja-JP" sz="2400" dirty="0"/>
+          </a:p>
+          <a:p>
+            <a:r>
+              <a:rPr lang="ja-JP" altLang="en-US" sz="2400" b="1" dirty="0">
+                <a:solidFill>
+                  <a:srgbClr val="FF0000"/>
+                </a:solidFill>
+              </a:rPr>
+              <a:t>■最低限のガチャの作り方（難易度：簡単）</a:t>
+            </a:r>
+            <a:endParaRPr lang="en-US" altLang="ja-JP" sz="2400" b="1" dirty="0">
+              <a:solidFill>
+                <a:srgbClr val="FF0000"/>
+              </a:solidFill>
+            </a:endParaRPr>
+          </a:p>
+          <a:p>
+            <a:r>
+              <a:rPr lang="ja-JP" altLang="en-US" sz="2400" dirty="0"/>
+              <a:t>１．クライアント側でガチャを回すリクエストをサーバーに送信</a:t>
+            </a:r>
+            <a:endParaRPr lang="en-US" altLang="ja-JP" sz="2400" dirty="0"/>
+          </a:p>
+          <a:p>
+            <a:r>
+              <a:rPr lang="ja-JP" altLang="en-US" sz="2400" dirty="0"/>
+              <a:t>２．サーバー側は抽選し、結果をクライアントに返す</a:t>
+            </a:r>
+            <a:endParaRPr lang="en-US" altLang="ja-JP" sz="2400" dirty="0"/>
+          </a:p>
+          <a:p>
+            <a:r>
+              <a:rPr lang="ja-JP" altLang="en-US" sz="2400" dirty="0"/>
+              <a:t>３．サーバーから帰ってきた結果を表示する。</a:t>
+            </a:r>
+            <a:endParaRPr lang="en-US" altLang="ja-JP" sz="2400" dirty="0"/>
+          </a:p>
+          <a:p>
+            <a:endParaRPr lang="en-US" altLang="ja-JP" sz="2400" dirty="0"/>
+          </a:p>
+          <a:p>
+            <a:r>
+              <a:rPr lang="ja-JP" altLang="en-US" sz="2400" b="1" dirty="0">
+                <a:solidFill>
+                  <a:srgbClr val="FF0000"/>
+                </a:solidFill>
+              </a:rPr>
+              <a:t>■製品にやや近いガチャ（難易度：普通）</a:t>
+            </a:r>
+            <a:endParaRPr lang="en-US" altLang="ja-JP" sz="2400" b="1" dirty="0">
+              <a:solidFill>
+                <a:srgbClr val="FF0000"/>
+              </a:solidFill>
+            </a:endParaRPr>
+          </a:p>
+          <a:p>
+            <a:r>
+              <a:rPr lang="ja-JP" altLang="en-US" sz="2400" dirty="0"/>
+              <a:t>・</a:t>
+            </a:r>
+            <a:r>
+              <a:rPr lang="en-US" altLang="ja-JP" sz="2400" dirty="0"/>
+              <a:t>10</a:t>
+            </a:r>
+            <a:r>
+              <a:rPr lang="ja-JP" altLang="en-US" sz="2400" dirty="0"/>
+              <a:t>連ガチャや回数指定ガチャ</a:t>
+            </a:r>
+            <a:endParaRPr lang="en-US" altLang="ja-JP" sz="2400" dirty="0"/>
+          </a:p>
+          <a:p>
+            <a:r>
+              <a:rPr lang="ja-JP" altLang="en-US" sz="2400" dirty="0"/>
+              <a:t>・天井を作る</a:t>
+            </a:r>
+            <a:endParaRPr lang="en-US" altLang="ja-JP" sz="2400" dirty="0"/>
+          </a:p>
+          <a:p>
+            <a:endParaRPr lang="en-US" altLang="ja-JP" sz="2400" dirty="0"/>
+          </a:p>
+          <a:p>
+            <a:r>
+              <a:rPr lang="ja-JP" altLang="en-US" sz="2400" b="1" dirty="0">
+                <a:solidFill>
+                  <a:srgbClr val="FF0000"/>
+                </a:solidFill>
+              </a:rPr>
+              <a:t>■製品に近いガチャ（難易度：難しい）</a:t>
+            </a:r>
+            <a:endParaRPr lang="en-US" altLang="ja-JP" sz="2400" b="1" dirty="0">
+              <a:solidFill>
+                <a:srgbClr val="FF0000"/>
+              </a:solidFill>
+            </a:endParaRPr>
+          </a:p>
+          <a:p>
+            <a:r>
+              <a:rPr lang="ja-JP" altLang="en-US" sz="2400" dirty="0"/>
+              <a:t>・ガチャで引いたものをサーバー側でセーブする</a:t>
+            </a:r>
+            <a:endParaRPr lang="en-US" altLang="ja-JP" sz="2400" dirty="0"/>
+          </a:p>
+          <a:p>
+            <a:r>
+              <a:rPr lang="ja-JP" altLang="en-US" sz="2400" dirty="0"/>
+              <a:t>・クライアント側でどのアイテムを何個持っているか表示する</a:t>
+            </a:r>
+            <a:endParaRPr lang="en-US" altLang="ja-JP" sz="2400" dirty="0"/>
+          </a:p>
+        </p:txBody>
+      </p:sp>
+    </p:spTree>
+    <p:extLst>
+      <p:ext uri="{BB962C8B-B14F-4D97-AF65-F5344CB8AC3E}">
+        <p14:creationId xmlns:p14="http://schemas.microsoft.com/office/powerpoint/2010/main" val="3573385076"/>
+      </p:ext>
+    </p:extLst>
+  </p:cSld>
+  <p:clrMapOvr>
+    <a:masterClrMapping/>
+  </p:clrMapOvr>
+</p:sld>
+</file>
+
+<file path=ppt/slides/slide6.xml><?xml version="1.0" encoding="utf-8"?>
+<p:sld xmlns:a="http://schemas.openxmlformats.org/drawingml/2006/main" xmlns:r="http://schemas.openxmlformats.org/officeDocument/2006/relationships" xmlns:p="http://schemas.openxmlformats.org/presentationml/2006/main">
+  <p:cSld>
+    <p:spTree>
+      <p:nvGrpSpPr>
+        <p:cNvPr id="1" name=""/>
+        <p:cNvGrpSpPr/>
+        <p:nvPr/>
+      </p:nvGrpSpPr>
+      <p:grpSpPr>
+        <a:xfrm>
+          <a:off x="0" y="0"/>
+          <a:ext cx="0" cy="0"/>
+          <a:chOff x="0" y="0"/>
+          <a:chExt cx="0" cy="0"/>
+        </a:xfrm>
+      </p:grpSpPr>
+      <p:sp>
+        <p:nvSpPr>
+          <p:cNvPr id="4" name="テキスト ボックス 3">
+            <a:extLst>
+              <a:ext uri="{FF2B5EF4-FFF2-40B4-BE49-F238E27FC236}">
+                <a16:creationId xmlns:a16="http://schemas.microsoft.com/office/drawing/2014/main" id="{5A13BF46-B8C5-48AA-8308-C9ECFF431A18}"/>
+              </a:ext>
+            </a:extLst>
+          </p:cNvPr>
+          <p:cNvSpPr txBox="1"/>
+          <p:nvPr/>
+        </p:nvSpPr>
+        <p:spPr>
+          <a:xfrm>
+            <a:off x="567542" y="491954"/>
+            <a:ext cx="3057247" cy="584775"/>
+          </a:xfrm>
+          <a:prstGeom prst="rect">
+            <a:avLst/>
+          </a:prstGeom>
+          <a:noFill/>
+        </p:spPr>
+        <p:txBody>
+          <a:bodyPr wrap="none" rtlCol="0">
+            <a:spAutoFit/>
+          </a:bodyPr>
+          <a:lstStyle/>
+          <a:p>
+            <a:r>
+              <a:rPr kumimoji="1" lang="ja-JP" altLang="en-US" sz="3200" b="1" u="sng" dirty="0"/>
+              <a:t>ゲーム制作課題</a:t>
+            </a:r>
+          </a:p>
+        </p:txBody>
+      </p:sp>
+      <p:sp>
+        <p:nvSpPr>
+          <p:cNvPr id="6" name="テキスト ボックス 5">
+            <a:extLst>
+              <a:ext uri="{FF2B5EF4-FFF2-40B4-BE49-F238E27FC236}">
+                <a16:creationId xmlns:a16="http://schemas.microsoft.com/office/drawing/2014/main" id="{55830AD6-028B-4C4E-80BF-B70DFC1C3A46}"/>
+              </a:ext>
+            </a:extLst>
+          </p:cNvPr>
+          <p:cNvSpPr txBox="1"/>
+          <p:nvPr/>
+        </p:nvSpPr>
+        <p:spPr>
+          <a:xfrm>
+            <a:off x="567542" y="1216429"/>
             <a:ext cx="10649069" cy="3046988"/>
           </a:xfrm>
           <a:prstGeom prst="rect">
@@ -4524,7 +4744,7 @@
           <a:p>
             <a:r>
               <a:rPr lang="ja-JP" altLang="en-US" sz="2400" dirty="0"/>
-              <a:t>これまでの授業から、オンライン要素のプログラムがとても難しいことは、</a:t>
+              <a:t>これまでの授業から、ネットワークプログラミングがとても難しいことは、</a:t>
             </a:r>
             <a:endParaRPr lang="en-US" altLang="ja-JP" sz="2400" dirty="0"/>
           </a:p>

--- a/ゲーム科3年/00_前期/オンラインゲームプログラミングⅠ/13_ゲーム制作課題.pptx
+++ b/ゲーム科3年/00_前期/オンラインゲームプログラミングⅠ/13_ゲーム制作課題.pptx
@@ -264,7 +264,7 @@
           <a:p>
             <a:fld id="{E9CC885B-4903-4D54-9A93-00025F12DED9}" type="datetimeFigureOut">
               <a:rPr kumimoji="1" lang="ja-JP" altLang="en-US" smtClean="0"/>
-              <a:t>2026/1/19</a:t>
+              <a:t>2026/5/18</a:t>
             </a:fld>
             <a:endParaRPr kumimoji="1" lang="ja-JP" altLang="en-US"/>
           </a:p>
@@ -494,7 +494,7 @@
           <a:p>
             <a:fld id="{E9CC885B-4903-4D54-9A93-00025F12DED9}" type="datetimeFigureOut">
               <a:rPr kumimoji="1" lang="ja-JP" altLang="en-US" smtClean="0"/>
-              <a:t>2026/1/19</a:t>
+              <a:t>2026/5/18</a:t>
             </a:fld>
             <a:endParaRPr kumimoji="1" lang="ja-JP" altLang="en-US"/>
           </a:p>
@@ -734,7 +734,7 @@
           <a:p>
             <a:fld id="{E9CC885B-4903-4D54-9A93-00025F12DED9}" type="datetimeFigureOut">
               <a:rPr kumimoji="1" lang="ja-JP" altLang="en-US" smtClean="0"/>
-              <a:t>2026/1/19</a:t>
+              <a:t>2026/5/18</a:t>
             </a:fld>
             <a:endParaRPr kumimoji="1" lang="ja-JP" altLang="en-US"/>
           </a:p>
@@ -964,7 +964,7 @@
           <a:p>
             <a:fld id="{E9CC885B-4903-4D54-9A93-00025F12DED9}" type="datetimeFigureOut">
               <a:rPr kumimoji="1" lang="ja-JP" altLang="en-US" smtClean="0"/>
-              <a:t>2026/1/19</a:t>
+              <a:t>2026/5/18</a:t>
             </a:fld>
             <a:endParaRPr kumimoji="1" lang="ja-JP" altLang="en-US"/>
           </a:p>
@@ -1239,7 +1239,7 @@
           <a:p>
             <a:fld id="{E9CC885B-4903-4D54-9A93-00025F12DED9}" type="datetimeFigureOut">
               <a:rPr kumimoji="1" lang="ja-JP" altLang="en-US" smtClean="0"/>
-              <a:t>2026/1/19</a:t>
+              <a:t>2026/5/18</a:t>
             </a:fld>
             <a:endParaRPr kumimoji="1" lang="ja-JP" altLang="en-US"/>
           </a:p>
@@ -1568,7 +1568,7 @@
           <a:p>
             <a:fld id="{E9CC885B-4903-4D54-9A93-00025F12DED9}" type="datetimeFigureOut">
               <a:rPr kumimoji="1" lang="ja-JP" altLang="en-US" smtClean="0"/>
-              <a:t>2026/1/19</a:t>
+              <a:t>2026/5/18</a:t>
             </a:fld>
             <a:endParaRPr kumimoji="1" lang="ja-JP" altLang="en-US"/>
           </a:p>
@@ -2044,7 +2044,7 @@
           <a:p>
             <a:fld id="{E9CC885B-4903-4D54-9A93-00025F12DED9}" type="datetimeFigureOut">
               <a:rPr kumimoji="1" lang="ja-JP" altLang="en-US" smtClean="0"/>
-              <a:t>2026/1/19</a:t>
+              <a:t>2026/5/18</a:t>
             </a:fld>
             <a:endParaRPr kumimoji="1" lang="ja-JP" altLang="en-US"/>
           </a:p>
@@ -2185,7 +2185,7 @@
           <a:p>
             <a:fld id="{E9CC885B-4903-4D54-9A93-00025F12DED9}" type="datetimeFigureOut">
               <a:rPr kumimoji="1" lang="ja-JP" altLang="en-US" smtClean="0"/>
-              <a:t>2026/1/19</a:t>
+              <a:t>2026/5/18</a:t>
             </a:fld>
             <a:endParaRPr kumimoji="1" lang="ja-JP" altLang="en-US"/>
           </a:p>
@@ -2298,7 +2298,7 @@
           <a:p>
             <a:fld id="{E9CC885B-4903-4D54-9A93-00025F12DED9}" type="datetimeFigureOut">
               <a:rPr kumimoji="1" lang="ja-JP" altLang="en-US" smtClean="0"/>
-              <a:t>2026/1/19</a:t>
+              <a:t>2026/5/18</a:t>
             </a:fld>
             <a:endParaRPr kumimoji="1" lang="ja-JP" altLang="en-US"/>
           </a:p>
@@ -2641,7 +2641,7 @@
           <a:p>
             <a:fld id="{E9CC885B-4903-4D54-9A93-00025F12DED9}" type="datetimeFigureOut">
               <a:rPr kumimoji="1" lang="ja-JP" altLang="en-US" smtClean="0"/>
-              <a:t>2026/1/19</a:t>
+              <a:t>2026/5/18</a:t>
             </a:fld>
             <a:endParaRPr kumimoji="1" lang="ja-JP" altLang="en-US"/>
           </a:p>
@@ -2929,7 +2929,7 @@
           <a:p>
             <a:fld id="{E9CC885B-4903-4D54-9A93-00025F12DED9}" type="datetimeFigureOut">
               <a:rPr kumimoji="1" lang="ja-JP" altLang="en-US" smtClean="0"/>
-              <a:t>2026/1/19</a:t>
+              <a:t>2026/5/18</a:t>
             </a:fld>
             <a:endParaRPr kumimoji="1" lang="ja-JP" altLang="en-US"/>
           </a:p>
@@ -3202,7 +3202,7 @@
           <a:p>
             <a:fld id="{E9CC885B-4903-4D54-9A93-00025F12DED9}" type="datetimeFigureOut">
               <a:rPr kumimoji="1" lang="ja-JP" altLang="en-US" smtClean="0"/>
-              <a:t>2026/1/19</a:t>
+              <a:t>2026/5/18</a:t>
             </a:fld>
             <a:endParaRPr kumimoji="1" lang="ja-JP" altLang="en-US"/>
           </a:p>
@@ -4510,7 +4510,7 @@
         <p:spPr>
           <a:xfrm>
             <a:off x="567542" y="1216429"/>
-            <a:ext cx="9725739" cy="5632311"/>
+            <a:ext cx="9417963" cy="5262979"/>
           </a:xfrm>
           <a:prstGeom prst="rect">
             <a:avLst/>
@@ -4576,9 +4576,6 @@
             <a:endParaRPr lang="en-US" altLang="ja-JP" sz="2400" dirty="0"/>
           </a:p>
           <a:p>
-            <a:endParaRPr lang="en-US" altLang="ja-JP" sz="2400" dirty="0"/>
-          </a:p>
-          <a:p>
             <a:r>
               <a:rPr lang="ja-JP" altLang="en-US" sz="2400" b="1" dirty="0">
                 <a:solidFill>
@@ -4616,9 +4613,6 @@
             <a:endParaRPr lang="en-US" altLang="ja-JP" sz="2400" dirty="0"/>
           </a:p>
           <a:p>
-            <a:endParaRPr lang="en-US" altLang="ja-JP" sz="2400" dirty="0"/>
-          </a:p>
-          <a:p>
             <a:r>
               <a:rPr lang="ja-JP" altLang="en-US" sz="2400" b="1" dirty="0">
                 <a:solidFill>
@@ -4643,7 +4637,14 @@
           <a:p>
             <a:r>
               <a:rPr lang="ja-JP" altLang="en-US" sz="2400" dirty="0"/>
-              <a:t>・クライアント側でどのアイテムを何個持っているか表示する</a:t>
+              <a:t>・サーバー側のセーブデータを元に</a:t>
+            </a:r>
+            <a:endParaRPr lang="en-US" altLang="ja-JP" sz="2400" dirty="0"/>
+          </a:p>
+          <a:p>
+            <a:r>
+              <a:rPr lang="ja-JP" altLang="en-US" sz="2400" dirty="0"/>
+              <a:t>　クライアント側でどのアイテムを何個持っているか表示する</a:t>
             </a:r>
             <a:endParaRPr lang="en-US" altLang="ja-JP" sz="2400" dirty="0"/>
           </a:p>

--- a/ゲーム科3年/00_前期/オンラインゲームプログラミングⅠ/13_ゲーム制作課題.pptx
+++ b/ゲーム科3年/00_前期/オンラインゲームプログラミングⅠ/13_ゲーム制作課題.pptx
@@ -264,7 +264,7 @@
           <a:p>
             <a:fld id="{E9CC885B-4903-4D54-9A93-00025F12DED9}" type="datetimeFigureOut">
               <a:rPr kumimoji="1" lang="ja-JP" altLang="en-US" smtClean="0"/>
-              <a:t>2026/5/18</a:t>
+              <a:t>2026/5/25</a:t>
             </a:fld>
             <a:endParaRPr kumimoji="1" lang="ja-JP" altLang="en-US"/>
           </a:p>
@@ -494,7 +494,7 @@
           <a:p>
             <a:fld id="{E9CC885B-4903-4D54-9A93-00025F12DED9}" type="datetimeFigureOut">
               <a:rPr kumimoji="1" lang="ja-JP" altLang="en-US" smtClean="0"/>
-              <a:t>2026/5/18</a:t>
+              <a:t>2026/5/25</a:t>
             </a:fld>
             <a:endParaRPr kumimoji="1" lang="ja-JP" altLang="en-US"/>
           </a:p>
@@ -734,7 +734,7 @@
           <a:p>
             <a:fld id="{E9CC885B-4903-4D54-9A93-00025F12DED9}" type="datetimeFigureOut">
               <a:rPr kumimoji="1" lang="ja-JP" altLang="en-US" smtClean="0"/>
-              <a:t>2026/5/18</a:t>
+              <a:t>2026/5/25</a:t>
             </a:fld>
             <a:endParaRPr kumimoji="1" lang="ja-JP" altLang="en-US"/>
           </a:p>
@@ -964,7 +964,7 @@
           <a:p>
             <a:fld id="{E9CC885B-4903-4D54-9A93-00025F12DED9}" type="datetimeFigureOut">
               <a:rPr kumimoji="1" lang="ja-JP" altLang="en-US" smtClean="0"/>
-              <a:t>2026/5/18</a:t>
+              <a:t>2026/5/25</a:t>
             </a:fld>
             <a:endParaRPr kumimoji="1" lang="ja-JP" altLang="en-US"/>
           </a:p>
@@ -1239,7 +1239,7 @@
           <a:p>
             <a:fld id="{E9CC885B-4903-4D54-9A93-00025F12DED9}" type="datetimeFigureOut">
               <a:rPr kumimoji="1" lang="ja-JP" altLang="en-US" smtClean="0"/>
-              <a:t>2026/5/18</a:t>
+              <a:t>2026/5/25</a:t>
             </a:fld>
             <a:endParaRPr kumimoji="1" lang="ja-JP" altLang="en-US"/>
           </a:p>
@@ -1568,7 +1568,7 @@
           <a:p>
             <a:fld id="{E9CC885B-4903-4D54-9A93-00025F12DED9}" type="datetimeFigureOut">
               <a:rPr kumimoji="1" lang="ja-JP" altLang="en-US" smtClean="0"/>
-              <a:t>2026/5/18</a:t>
+              <a:t>2026/5/25</a:t>
             </a:fld>
             <a:endParaRPr kumimoji="1" lang="ja-JP" altLang="en-US"/>
           </a:p>
@@ -2044,7 +2044,7 @@
           <a:p>
             <a:fld id="{E9CC885B-4903-4D54-9A93-00025F12DED9}" type="datetimeFigureOut">
               <a:rPr kumimoji="1" lang="ja-JP" altLang="en-US" smtClean="0"/>
-              <a:t>2026/5/18</a:t>
+              <a:t>2026/5/25</a:t>
             </a:fld>
             <a:endParaRPr kumimoji="1" lang="ja-JP" altLang="en-US"/>
           </a:p>
@@ -2185,7 +2185,7 @@
           <a:p>
             <a:fld id="{E9CC885B-4903-4D54-9A93-00025F12DED9}" type="datetimeFigureOut">
               <a:rPr kumimoji="1" lang="ja-JP" altLang="en-US" smtClean="0"/>
-              <a:t>2026/5/18</a:t>
+              <a:t>2026/5/25</a:t>
             </a:fld>
             <a:endParaRPr kumimoji="1" lang="ja-JP" altLang="en-US"/>
           </a:p>
@@ -2298,7 +2298,7 @@
           <a:p>
             <a:fld id="{E9CC885B-4903-4D54-9A93-00025F12DED9}" type="datetimeFigureOut">
               <a:rPr kumimoji="1" lang="ja-JP" altLang="en-US" smtClean="0"/>
-              <a:t>2026/5/18</a:t>
+              <a:t>2026/5/25</a:t>
             </a:fld>
             <a:endParaRPr kumimoji="1" lang="ja-JP" altLang="en-US"/>
           </a:p>
@@ -2641,7 +2641,7 @@
           <a:p>
             <a:fld id="{E9CC885B-4903-4D54-9A93-00025F12DED9}" type="datetimeFigureOut">
               <a:rPr kumimoji="1" lang="ja-JP" altLang="en-US" smtClean="0"/>
-              <a:t>2026/5/18</a:t>
+              <a:t>2026/5/25</a:t>
             </a:fld>
             <a:endParaRPr kumimoji="1" lang="ja-JP" altLang="en-US"/>
           </a:p>
@@ -2929,7 +2929,7 @@
           <a:p>
             <a:fld id="{E9CC885B-4903-4D54-9A93-00025F12DED9}" type="datetimeFigureOut">
               <a:rPr kumimoji="1" lang="ja-JP" altLang="en-US" smtClean="0"/>
-              <a:t>2026/5/18</a:t>
+              <a:t>2026/5/25</a:t>
             </a:fld>
             <a:endParaRPr kumimoji="1" lang="ja-JP" altLang="en-US"/>
           </a:p>
@@ -3202,7 +3202,7 @@
           <a:p>
             <a:fld id="{E9CC885B-4903-4D54-9A93-00025F12DED9}" type="datetimeFigureOut">
               <a:rPr kumimoji="1" lang="ja-JP" altLang="en-US" smtClean="0"/>
-              <a:t>2026/5/18</a:t>
+              <a:t>2026/5/25</a:t>
             </a:fld>
             <a:endParaRPr kumimoji="1" lang="ja-JP" altLang="en-US"/>
           </a:p>
@@ -4571,7 +4571,15 @@
           <a:p>
             <a:r>
               <a:rPr lang="ja-JP" altLang="en-US" sz="2400" dirty="0"/>
-              <a:t>３．サーバーから帰ってきた結果を表示する。</a:t>
+              <a:t>３．</a:t>
+            </a:r>
+            <a:r>
+              <a:rPr lang="ja-JP" altLang="en-US" sz="2400"/>
+              <a:t>サーバーから返ってきた結果</a:t>
+            </a:r>
+            <a:r>
+              <a:rPr lang="ja-JP" altLang="en-US" sz="2400" dirty="0"/>
+              <a:t>を表示する。</a:t>
             </a:r>
             <a:endParaRPr lang="en-US" altLang="ja-JP" sz="2400" dirty="0"/>
           </a:p>
